--- a/docs/vzp_pitch/pitch_3min.pptx
+++ b/docs/vzp_pitch/pitch_3min.pptx
@@ -732,7 +732,7 @@
           <a:lstStyle/>
           <a:p>
             <a:r>
-              <a:t>35 s. Jak je používáme? Každý segment dostane kanál, kterým ho zastihneme, a opatření, které podle studií funguje. Prvním pozvaným pevný termín místo otevřené pozvánky: v anglických studiích plus deset až devatenáct bodů. Ženám u gynekologa nebo praktika oslovení přes lékaře. Nedávno vyšetřeným dopis neposíláme vůbec. Z e-commerce přinášíme způsob práce: automatické kaskády zpráv, A/B test s kontrolní skupinou u každé změny a měření skutečného přírůstku, ne kliknutí.</a:t>
+              <a:t>35 s. Jak je používáme? Každý segment dostane kanál, kterým ho zastihneme, a opatření, které podle studií funguje. Prvním pozvaným a vypadlým pevný termín místo otevřené pozvánky: v anglických studiích plus deset až devatenáct bodů. Ženám u gynekologa nebo praktika oslovení přes lékaře. Nedávno vyšetřeným dopis neposíláme vůbec. Z e-commerce přinášíme způsob práce: automatické kaskády zpráv, A/B test s kontrolní skupinou u každé změny a měření skutečného přírůstku, ne kliknutí.</a:t>
             </a:r>
           </a:p>
         </p:txBody>
@@ -4844,7 +4844,7 @@
                             <a:srgbClr val="230F3C"/>
                           </a:solidFill>
                         </a:rPr>
-                        <a:t>dřívější připomínka s termínem (25.–36. měsíc)</a:t>
+                        <a:t>pevný termín dřív: ve 25.–36. měsíci místo po 3–5 letech</a:t>
                       </a:r>
                     </a:p>
                   </a:txBody>
@@ -4861,12 +4861,12 @@
                     <a:p>
                       <a:pPr algn="r"/>
                       <a:r>
-                        <a:rPr sz="1050" b="0">
+                        <a:rPr sz="1050" b="1">
                           <a:solidFill>
                             <a:srgbClr val="230F3C"/>
                           </a:solidFill>
                         </a:rPr>
-                        <a:t>+2 až +6</a:t>
+                        <a:t>+10 až +19</a:t>
                       </a:r>
                     </a:p>
                   </a:txBody>
